--- a/Class/PPT/7 Working with Databases — SQLite.pptx
+++ b/Class/PPT/7 Working with Databases — SQLite.pptx
@@ -3120,7 +3120,7 @@
             <a:alphaModFix/>
             <a:extLst>
               <a:ext uri="{899FBA48-7B2C-474C-B2AE-7FA3B76AA679}">
-                <a14:useLocalDpi xmlns:a14="http://schemas.microsoft.com/office/drawing/2010/main" xmlns:p14="http://schemas.microsoft.com/office/powerpoint/2010/main" xmlns:asvg="http://schemas.microsoft.com/office/drawing/2016/SVG/main" xmlns:a16="http://schemas.microsoft.com/office/drawing/2014/main" xmlns="" val="0"/>
+                <a14:useLocalDpi xmlns="" xmlns:a16="http://schemas.microsoft.com/office/drawing/2014/main" xmlns:asvg="http://schemas.microsoft.com/office/drawing/2016/SVG/main" xmlns:p14="http://schemas.microsoft.com/office/powerpoint/2010/main" xmlns:a14="http://schemas.microsoft.com/office/drawing/2010/main" val="0"/>
               </a:ext>
             </a:extLst>
           </a:blip>
@@ -6277,7 +6277,7 @@
             </a:r>
             <a:r>
               <a:rPr lang="en-US" sz="1400" dirty="0"/>
-              <a:t>.)</a:t>
+              <a:t>.) Windows user</a:t>
             </a:r>
             <a:br>
               <a:rPr lang="en-US" dirty="0"/>
